--- a/template.pptx
+++ b/template.pptx
@@ -5254,7 +5254,7 @@
     </a:clrScheme>
     <a:fontScheme name="Office">
       <a:majorFont>
-        <a:latin typeface="Arial"/>
+        <a:latin typeface="Fira Sans"/>
         <a:ea typeface=""/>
         <a:cs typeface=""/>
         <a:font script="Jpan" typeface="ＭＳ Ｐゴシック"/>
@@ -5289,7 +5289,7 @@
         <a:font script="Geor" typeface="Sylfaen"/>
       </a:majorFont>
       <a:minorFont>
-        <a:latin typeface="Arial"/>
+        <a:latin typeface="Fira Sans"/>
         <a:ea typeface=""/>
         <a:cs typeface=""/>
         <a:font script="Jpan" typeface="ＭＳ Ｐゴシック"/>
@@ -5535,7 +5535,7 @@
     </a:clrScheme>
     <a:fontScheme name="Office">
       <a:majorFont>
-        <a:latin typeface="Arial"/>
+        <a:latin typeface="Fira Sans"/>
         <a:ea typeface=""/>
         <a:cs typeface=""/>
         <a:font script="Jpan" typeface="ＭＳ Ｐゴシック"/>
@@ -5570,7 +5570,7 @@
         <a:font script="Geor" typeface="Sylfaen"/>
       </a:majorFont>
       <a:minorFont>
-        <a:latin typeface="Arial"/>
+        <a:latin typeface="Fira Sans"/>
         <a:ea typeface=""/>
         <a:cs typeface=""/>
         <a:font script="Jpan" typeface="ＭＳ Ｐゴシック"/>
